--- a/examples/semanticslides/SemanticSlides.pptx
+++ b/examples/semanticslides/SemanticSlides.pptx
@@ -5,11 +5,12 @@
     <p:sldMasterId id="2147483648" r:id="rId1"/>
   </p:sldMasterIdLst>
   <p:notesMasterIdLst>
-    <p:notesMasterId r:id="rId4"/>
+    <p:notesMasterId r:id="rId5"/>
   </p:notesMasterIdLst>
   <p:sldIdLst>
     <p:sldId id="256" r:id="rId2"/>
     <p:sldId id="257" r:id="rId3"/>
+    <p:sldId id="258" r:id="rId4"/>
   </p:sldIdLst>
   <p:sldSz cx="12192000" cy="6858000"/>
   <p:notesSz cx="6858000" cy="9144000"/>
@@ -108,6 +109,11 @@
       </a:defRPr>
     </a:lvl9pPr>
   </p:defaultTextStyle>
+  <p:extLst>
+    <p:ext uri="{EFAFB233-063F-42B5-8137-9DF3F51BA10A}">
+      <p15:sldGuideLst xmlns:p15="http://schemas.microsoft.com/office/powerpoint/2012/main"/>
+    </p:ext>
+  </p:extLst>
 </p:presentation>
 </file>
 
@@ -193,7 +199,7 @@
           <a:p>
             <a:fld id="{66020135-F817-724D-9ABC-3B95BF2961DC}" type="datetimeFigureOut">
               <a:rPr lang="de-DE" smtClean="0"/>
-              <a:t>14.02.23</a:t>
+              <a:t>03.06.25</a:t>
             </a:fld>
             <a:endParaRPr lang="de-DE"/>
           </a:p>
@@ -257,38 +263,37 @@
           <a:p>
             <a:pPr lvl="0"/>
             <a:r>
-              <a:rPr lang="de-DE" smtClean="0"/>
+              <a:rPr lang="de-DE"/>
               <a:t>Mastertextformat bearbeiten</a:t>
             </a:r>
           </a:p>
           <a:p>
             <a:pPr lvl="1"/>
             <a:r>
-              <a:rPr lang="de-DE" smtClean="0"/>
+              <a:rPr lang="de-DE"/>
               <a:t>Zweite Ebene</a:t>
             </a:r>
           </a:p>
           <a:p>
             <a:pPr lvl="2"/>
             <a:r>
-              <a:rPr lang="de-DE" smtClean="0"/>
+              <a:rPr lang="de-DE"/>
               <a:t>Dritte Ebene</a:t>
             </a:r>
           </a:p>
           <a:p>
             <a:pPr lvl="3"/>
             <a:r>
-              <a:rPr lang="de-DE" smtClean="0"/>
+              <a:rPr lang="de-DE"/>
               <a:t>Vierte Ebene</a:t>
             </a:r>
           </a:p>
           <a:p>
             <a:pPr lvl="4"/>
             <a:r>
-              <a:rPr lang="de-DE" smtClean="0"/>
+              <a:rPr lang="de-DE"/>
               <a:t>Fünfte Ebene</a:t>
             </a:r>
-            <a:endParaRPr lang="de-DE"/>
           </a:p>
         </p:txBody>
       </p:sp>
@@ -505,79 +510,163 @@
           <a:bodyPr/>
           <a:lstStyle/>
           <a:p>
-            <a:r>
-              <a:rPr lang="de-DE" dirty="0" smtClean="0"/>
+            <a:endParaRPr lang="de-DE"/>
+          </a:p>
+        </p:txBody>
+      </p:sp>
+      <p:sp>
+        <p:nvSpPr>
+          <p:cNvPr id="4" name="Foliennummernplatzhalter 3"/>
+          <p:cNvSpPr>
+            <a:spLocks noGrp="1"/>
+          </p:cNvSpPr>
+          <p:nvPr>
+            <p:ph type="sldNum" sz="quarter" idx="5"/>
+          </p:nvPr>
+        </p:nvSpPr>
+        <p:spPr/>
+        <p:txBody>
+          <a:bodyPr/>
+          <a:lstStyle/>
+          <a:p>
+            <a:fld id="{3B6B2794-06AB-A042-815E-1DCDC814A678}" type="slidenum">
+              <a:rPr lang="de-DE" smtClean="0"/>
+              <a:t>1</a:t>
+            </a:fld>
+            <a:endParaRPr lang="de-DE"/>
+          </a:p>
+        </p:txBody>
+      </p:sp>
+    </p:spTree>
+    <p:extLst>
+      <p:ext uri="{BB962C8B-B14F-4D97-AF65-F5344CB8AC3E}">
+        <p14:creationId xmlns:p14="http://schemas.microsoft.com/office/powerpoint/2010/main" val="2491515176"/>
+      </p:ext>
+    </p:extLst>
+  </p:cSld>
+  <p:clrMapOvr>
+    <a:masterClrMapping/>
+  </p:clrMapOvr>
+</p:notes>
+</file>
+
+<file path=ppt/notesSlides/notesSlide2.xml><?xml version="1.0" encoding="utf-8"?>
+<p:notes xmlns:a="http://schemas.openxmlformats.org/drawingml/2006/main" xmlns:r="http://schemas.openxmlformats.org/officeDocument/2006/relationships" xmlns:p="http://schemas.openxmlformats.org/presentationml/2006/main">
+  <p:cSld>
+    <p:spTree>
+      <p:nvGrpSpPr>
+        <p:cNvPr id="1" name=""/>
+        <p:cNvGrpSpPr/>
+        <p:nvPr/>
+      </p:nvGrpSpPr>
+      <p:grpSpPr>
+        <a:xfrm>
+          <a:off x="0" y="0"/>
+          <a:ext cx="0" cy="0"/>
+          <a:chOff x="0" y="0"/>
+          <a:chExt cx="0" cy="0"/>
+        </a:xfrm>
+      </p:grpSpPr>
+      <p:sp>
+        <p:nvSpPr>
+          <p:cNvPr id="2" name="Folienbildplatzhalter 1"/>
+          <p:cNvSpPr>
+            <a:spLocks noGrp="1" noRot="1" noChangeAspect="1"/>
+          </p:cNvSpPr>
+          <p:nvPr>
+            <p:ph type="sldImg"/>
+          </p:nvPr>
+        </p:nvSpPr>
+        <p:spPr/>
+      </p:sp>
+      <p:sp>
+        <p:nvSpPr>
+          <p:cNvPr id="3" name="Notizenplatzhalter 2"/>
+          <p:cNvSpPr>
+            <a:spLocks noGrp="1"/>
+          </p:cNvSpPr>
+          <p:nvPr>
+            <p:ph type="body" idx="1"/>
+          </p:nvPr>
+        </p:nvSpPr>
+        <p:spPr/>
+        <p:txBody>
+          <a:bodyPr/>
+          <a:lstStyle/>
+          <a:p>
+            <a:r>
+              <a:rPr lang="de-DE" dirty="0"/>
               <a:t>Name:</a:t>
             </a:r>
             <a:r>
-              <a:rPr lang="de-DE" baseline="0" dirty="0" smtClean="0"/>
+              <a:rPr lang="de-DE" baseline="0" dirty="0"/>
               <a:t> </a:t>
             </a:r>
             <a:r>
-              <a:rPr lang="de-DE" baseline="0" dirty="0" err="1" smtClean="0"/>
+              <a:rPr lang="de-DE" baseline="0" dirty="0" err="1"/>
               <a:t>Why_semantify</a:t>
             </a:r>
-            <a:endParaRPr lang="de-DE" baseline="0" dirty="0" smtClean="0"/>
-          </a:p>
-          <a:p>
-            <a:r>
-              <a:rPr lang="de-DE" baseline="0" dirty="0" smtClean="0"/>
+            <a:endParaRPr lang="de-DE" baseline="0" dirty="0"/>
+          </a:p>
+          <a:p>
+            <a:r>
+              <a:rPr lang="de-DE" baseline="0" dirty="0"/>
               <a:t>Title: </a:t>
             </a:r>
             <a:r>
-              <a:rPr lang="de-DE" baseline="0" dirty="0" err="1" smtClean="0"/>
+              <a:rPr lang="de-DE" baseline="0" dirty="0" err="1"/>
               <a:t>Why</a:t>
             </a:r>
             <a:r>
-              <a:rPr lang="de-DE" baseline="0" dirty="0" smtClean="0"/>
+              <a:rPr lang="de-DE" baseline="0" dirty="0"/>
               <a:t> </a:t>
             </a:r>
             <a:r>
-              <a:rPr lang="de-DE" baseline="0" dirty="0" err="1" smtClean="0"/>
+              <a:rPr lang="de-DE" baseline="0" dirty="0" err="1"/>
               <a:t>semantify</a:t>
             </a:r>
             <a:r>
-              <a:rPr lang="de-DE" baseline="0" dirty="0" smtClean="0"/>
+              <a:rPr lang="de-DE" baseline="0" dirty="0"/>
               <a:t> </a:t>
             </a:r>
             <a:r>
-              <a:rPr lang="de-DE" baseline="0" dirty="0" err="1" smtClean="0"/>
+              <a:rPr lang="de-DE" baseline="0" dirty="0" err="1"/>
               <a:t>your</a:t>
             </a:r>
             <a:r>
-              <a:rPr lang="de-DE" baseline="0" dirty="0" smtClean="0"/>
+              <a:rPr lang="de-DE" baseline="0" dirty="0"/>
               <a:t> </a:t>
             </a:r>
             <a:r>
-              <a:rPr lang="de-DE" baseline="0" dirty="0" err="1" smtClean="0"/>
+              <a:rPr lang="de-DE" baseline="0" dirty="0" err="1"/>
               <a:t>slides</a:t>
             </a:r>
             <a:r>
-              <a:rPr lang="de-DE" baseline="0" dirty="0" smtClean="0"/>
+              <a:rPr lang="de-DE" baseline="0" dirty="0"/>
               <a:t>?</a:t>
             </a:r>
           </a:p>
           <a:p>
             <a:r>
-              <a:rPr lang="de-DE" baseline="0" dirty="0" smtClean="0"/>
+              <a:rPr lang="de-DE" baseline="0" dirty="0"/>
               <a:t>Keywords:  </a:t>
             </a:r>
             <a:r>
-              <a:rPr lang="de-DE" baseline="0" dirty="0" err="1" smtClean="0"/>
+              <a:rPr lang="de-DE" baseline="0" dirty="0" err="1"/>
               <a:t>Semantification</a:t>
             </a:r>
             <a:r>
-              <a:rPr lang="de-DE" baseline="0" dirty="0" smtClean="0"/>
+              <a:rPr lang="de-DE" baseline="0" dirty="0"/>
               <a:t>, FAIR</a:t>
             </a:r>
           </a:p>
           <a:p>
             <a:r>
-              <a:rPr lang="de-DE" baseline="0" dirty="0" err="1" smtClean="0"/>
+              <a:rPr lang="de-DE" baseline="0" dirty="0" err="1"/>
               <a:t>Literature</a:t>
             </a:r>
             <a:r>
-              <a:rPr lang="de-DE" baseline="0" smtClean="0"/>
+              <a:rPr lang="de-DE" baseline="0"/>
               <a:t>: Furth2018, Fair2016</a:t>
             </a:r>
             <a:endParaRPr lang="de-DE" dirty="0"/>
@@ -611,6 +700,174 @@
     <p:extLst>
       <p:ext uri="{BB962C8B-B14F-4D97-AF65-F5344CB8AC3E}">
         <p14:creationId xmlns:p14="http://schemas.microsoft.com/office/powerpoint/2010/main" val="738236184"/>
+      </p:ext>
+    </p:extLst>
+  </p:cSld>
+  <p:clrMapOvr>
+    <a:masterClrMapping/>
+  </p:clrMapOvr>
+</p:notes>
+</file>
+
+<file path=ppt/notesSlides/notesSlide3.xml><?xml version="1.0" encoding="utf-8"?>
+<p:notes xmlns:a="http://schemas.openxmlformats.org/drawingml/2006/main" xmlns:r="http://schemas.openxmlformats.org/officeDocument/2006/relationships" xmlns:p="http://schemas.openxmlformats.org/presentationml/2006/main">
+  <p:cSld>
+    <p:spTree>
+      <p:nvGrpSpPr>
+        <p:cNvPr id="1" name=""/>
+        <p:cNvGrpSpPr/>
+        <p:nvPr/>
+      </p:nvGrpSpPr>
+      <p:grpSpPr>
+        <a:xfrm>
+          <a:off x="0" y="0"/>
+          <a:ext cx="0" cy="0"/>
+          <a:chOff x="0" y="0"/>
+          <a:chExt cx="0" cy="0"/>
+        </a:xfrm>
+      </p:grpSpPr>
+      <p:sp>
+        <p:nvSpPr>
+          <p:cNvPr id="2" name="Folienbildplatzhalter 1"/>
+          <p:cNvSpPr>
+            <a:spLocks noGrp="1" noRot="1" noChangeAspect="1"/>
+          </p:cNvSpPr>
+          <p:nvPr>
+            <p:ph type="sldImg"/>
+          </p:nvPr>
+        </p:nvSpPr>
+        <p:spPr/>
+      </p:sp>
+      <p:sp>
+        <p:nvSpPr>
+          <p:cNvPr id="3" name="Notizenplatzhalter 2"/>
+          <p:cNvSpPr>
+            <a:spLocks noGrp="1"/>
+          </p:cNvSpPr>
+          <p:nvPr>
+            <p:ph type="body" idx="1"/>
+          </p:nvPr>
+        </p:nvSpPr>
+        <p:spPr/>
+        <p:txBody>
+          <a:bodyPr/>
+          <a:lstStyle/>
+          <a:p>
+            <a:pPr marL="0" marR="0" lvl="0" indent="0" algn="l" defTabSz="914400" rtl="0" eaLnBrk="1" fontAlgn="auto" latinLnBrk="0" hangingPunct="1">
+              <a:lnSpc>
+                <a:spcPct val="100000"/>
+              </a:lnSpc>
+              <a:spcBef>
+                <a:spcPts val="0"/>
+              </a:spcBef>
+              <a:spcAft>
+                <a:spcPts val="0"/>
+              </a:spcAft>
+              <a:buClrTx/>
+              <a:buSzTx/>
+              <a:buFontTx/>
+              <a:buNone/>
+              <a:tabLst/>
+              <a:defRPr/>
+            </a:pPr>
+            <a:r>
+              <a:rPr lang="en-US" dirty="0">
+                <a:latin typeface="Arial" panose="020B0604020202020204" pitchFamily="34" charset="0"/>
+                <a:cs typeface="Arial" panose="020B0604020202020204" pitchFamily="34" charset="0"/>
+              </a:rPr>
+              <a:t>lg: LG42-42 </a:t>
+            </a:r>
+            <a:r>
+              <a:rPr lang="de-DE" i="1" dirty="0">
+                <a:effectLst/>
+                <a:highlight>
+                  <a:srgbClr val="FFFFFF"/>
+                </a:highlight>
+                <a:latin typeface="Arial" panose="020B0604020202020204" pitchFamily="34" charset="0"/>
+                <a:cs typeface="Arial" panose="020B0604020202020204" pitchFamily="34" charset="0"/>
+              </a:rPr>
+              <a:t>• </a:t>
+            </a:r>
+            <a:r>
+              <a:rPr lang="en-US" dirty="0">
+                <a:latin typeface="Arial" panose="020B0604020202020204" pitchFamily="34" charset="0"/>
+                <a:cs typeface="Arial" panose="020B0604020202020204" pitchFamily="34" charset="0"/>
+              </a:rPr>
+              <a:t>name: </a:t>
+            </a:r>
+            <a:r>
+              <a:rPr lang="de-DE" dirty="0">
+                <a:latin typeface="Arial" panose="020B0604020202020204" pitchFamily="34" charset="0"/>
+                <a:cs typeface="Arial" panose="020B0604020202020204" pitchFamily="34" charset="0"/>
+              </a:rPr>
+              <a:t>Key-Value-Parser </a:t>
+            </a:r>
+            <a:r>
+              <a:rPr lang="de-DE" i="1" dirty="0">
+                <a:effectLst/>
+                <a:highlight>
+                  <a:srgbClr val="FFFFFF"/>
+                </a:highlight>
+                <a:latin typeface="Arial" panose="020B0604020202020204" pitchFamily="34" charset="0"/>
+                <a:cs typeface="Arial" panose="020B0604020202020204" pitchFamily="34" charset="0"/>
+              </a:rPr>
+              <a:t>• </a:t>
+            </a:r>
+            <a:r>
+              <a:rPr lang="en-US" dirty="0" err="1">
+                <a:latin typeface="Arial" panose="020B0604020202020204" pitchFamily="34" charset="0"/>
+                <a:cs typeface="Arial" panose="020B0604020202020204" pitchFamily="34" charset="0"/>
+              </a:rPr>
+              <a:t>mainslide</a:t>
+            </a:r>
+            <a:r>
+              <a:rPr lang="en-US" dirty="0">
+                <a:latin typeface="Arial" panose="020B0604020202020204" pitchFamily="34" charset="0"/>
+                <a:cs typeface="Arial" panose="020B0604020202020204" pitchFamily="34" charset="0"/>
+              </a:rPr>
+              <a:t>: </a:t>
+            </a:r>
+            <a:r>
+              <a:rPr lang="de-DE" dirty="0"/>
+              <a:t>✔️</a:t>
+            </a:r>
+            <a:endParaRPr lang="en-US" dirty="0">
+              <a:latin typeface="Arial" panose="020B0604020202020204" pitchFamily="34" charset="0"/>
+              <a:cs typeface="Arial" panose="020B0604020202020204" pitchFamily="34" charset="0"/>
+            </a:endParaRPr>
+          </a:p>
+          <a:p>
+            <a:endParaRPr lang="de-DE" dirty="0"/>
+          </a:p>
+        </p:txBody>
+      </p:sp>
+      <p:sp>
+        <p:nvSpPr>
+          <p:cNvPr id="4" name="Foliennummernplatzhalter 3"/>
+          <p:cNvSpPr>
+            <a:spLocks noGrp="1"/>
+          </p:cNvSpPr>
+          <p:nvPr>
+            <p:ph type="sldNum" sz="quarter" idx="5"/>
+          </p:nvPr>
+        </p:nvSpPr>
+        <p:spPr/>
+        <p:txBody>
+          <a:bodyPr/>
+          <a:lstStyle/>
+          <a:p>
+            <a:fld id="{3B6B2794-06AB-A042-815E-1DCDC814A678}" type="slidenum">
+              <a:rPr lang="de-DE" smtClean="0"/>
+              <a:t>3</a:t>
+            </a:fld>
+            <a:endParaRPr lang="de-DE"/>
+          </a:p>
+        </p:txBody>
+      </p:sp>
+    </p:spTree>
+    <p:extLst>
+      <p:ext uri="{BB962C8B-B14F-4D97-AF65-F5344CB8AC3E}">
+        <p14:creationId xmlns:p14="http://schemas.microsoft.com/office/powerpoint/2010/main" val="665607490"/>
       </p:ext>
     </p:extLst>
   </p:cSld>
@@ -662,10 +919,9 @@
           </a:lstStyle>
           <a:p>
             <a:r>
-              <a:rPr lang="de-DE" smtClean="0"/>
+              <a:rPr lang="de-DE"/>
               <a:t>Mastertitelformat bearbeiten</a:t>
             </a:r>
-            <a:endParaRPr lang="de-DE"/>
           </a:p>
         </p:txBody>
       </p:sp>
@@ -727,10 +983,9 @@
           </a:lstStyle>
           <a:p>
             <a:r>
-              <a:rPr lang="de-DE" smtClean="0"/>
+              <a:rPr lang="de-DE"/>
               <a:t>Master-Untertitelformat bearbeiten</a:t>
             </a:r>
-            <a:endParaRPr lang="de-DE"/>
           </a:p>
         </p:txBody>
       </p:sp>
@@ -751,7 +1006,7 @@
           <a:p>
             <a:fld id="{C92B74A0-65D7-6742-9E62-732E39422DA6}" type="datetimeFigureOut">
               <a:rPr lang="de-DE" smtClean="0"/>
-              <a:t>14.02.23</a:t>
+              <a:t>03.06.25</a:t>
             </a:fld>
             <a:endParaRPr lang="de-DE"/>
           </a:p>
@@ -845,10 +1100,9 @@
           <a:lstStyle/>
           <a:p>
             <a:r>
-              <a:rPr lang="de-DE" smtClean="0"/>
+              <a:rPr lang="de-DE"/>
               <a:t>Mastertitelformat bearbeiten</a:t>
             </a:r>
-            <a:endParaRPr lang="de-DE"/>
           </a:p>
         </p:txBody>
       </p:sp>
@@ -869,38 +1123,37 @@
           <a:p>
             <a:pPr lvl="0"/>
             <a:r>
-              <a:rPr lang="de-DE" smtClean="0"/>
+              <a:rPr lang="de-DE"/>
               <a:t>Mastertextformat bearbeiten</a:t>
             </a:r>
           </a:p>
           <a:p>
             <a:pPr lvl="1"/>
             <a:r>
-              <a:rPr lang="de-DE" smtClean="0"/>
+              <a:rPr lang="de-DE"/>
               <a:t>Zweite Ebene</a:t>
             </a:r>
           </a:p>
           <a:p>
             <a:pPr lvl="2"/>
             <a:r>
-              <a:rPr lang="de-DE" smtClean="0"/>
+              <a:rPr lang="de-DE"/>
               <a:t>Dritte Ebene</a:t>
             </a:r>
           </a:p>
           <a:p>
             <a:pPr lvl="3"/>
             <a:r>
-              <a:rPr lang="de-DE" smtClean="0"/>
+              <a:rPr lang="de-DE"/>
               <a:t>Vierte Ebene</a:t>
             </a:r>
           </a:p>
           <a:p>
             <a:pPr lvl="4"/>
             <a:r>
-              <a:rPr lang="de-DE" smtClean="0"/>
+              <a:rPr lang="de-DE"/>
               <a:t>Fünfte Ebene</a:t>
             </a:r>
-            <a:endParaRPr lang="de-DE"/>
           </a:p>
         </p:txBody>
       </p:sp>
@@ -921,7 +1174,7 @@
           <a:p>
             <a:fld id="{C92B74A0-65D7-6742-9E62-732E39422DA6}" type="datetimeFigureOut">
               <a:rPr lang="de-DE" smtClean="0"/>
-              <a:t>14.02.23</a:t>
+              <a:t>03.06.25</a:t>
             </a:fld>
             <a:endParaRPr lang="de-DE"/>
           </a:p>
@@ -1020,10 +1273,9 @@
           <a:lstStyle/>
           <a:p>
             <a:r>
-              <a:rPr lang="de-DE" smtClean="0"/>
+              <a:rPr lang="de-DE"/>
               <a:t>Mastertitelformat bearbeiten</a:t>
             </a:r>
-            <a:endParaRPr lang="de-DE"/>
           </a:p>
         </p:txBody>
       </p:sp>
@@ -1049,38 +1301,37 @@
           <a:p>
             <a:pPr lvl="0"/>
             <a:r>
-              <a:rPr lang="de-DE" smtClean="0"/>
+              <a:rPr lang="de-DE"/>
               <a:t>Mastertextformat bearbeiten</a:t>
             </a:r>
           </a:p>
           <a:p>
             <a:pPr lvl="1"/>
             <a:r>
-              <a:rPr lang="de-DE" smtClean="0"/>
+              <a:rPr lang="de-DE"/>
               <a:t>Zweite Ebene</a:t>
             </a:r>
           </a:p>
           <a:p>
             <a:pPr lvl="2"/>
             <a:r>
-              <a:rPr lang="de-DE" smtClean="0"/>
+              <a:rPr lang="de-DE"/>
               <a:t>Dritte Ebene</a:t>
             </a:r>
           </a:p>
           <a:p>
             <a:pPr lvl="3"/>
             <a:r>
-              <a:rPr lang="de-DE" smtClean="0"/>
+              <a:rPr lang="de-DE"/>
               <a:t>Vierte Ebene</a:t>
             </a:r>
           </a:p>
           <a:p>
             <a:pPr lvl="4"/>
             <a:r>
-              <a:rPr lang="de-DE" smtClean="0"/>
+              <a:rPr lang="de-DE"/>
               <a:t>Fünfte Ebene</a:t>
             </a:r>
-            <a:endParaRPr lang="de-DE"/>
           </a:p>
         </p:txBody>
       </p:sp>
@@ -1101,7 +1352,7 @@
           <a:p>
             <a:fld id="{C92B74A0-65D7-6742-9E62-732E39422DA6}" type="datetimeFigureOut">
               <a:rPr lang="de-DE" smtClean="0"/>
-              <a:t>14.02.23</a:t>
+              <a:t>03.06.25</a:t>
             </a:fld>
             <a:endParaRPr lang="de-DE"/>
           </a:p>
@@ -1195,10 +1446,9 @@
           <a:lstStyle/>
           <a:p>
             <a:r>
-              <a:rPr lang="de-DE" smtClean="0"/>
+              <a:rPr lang="de-DE"/>
               <a:t>Mastertitelformat bearbeiten</a:t>
             </a:r>
-            <a:endParaRPr lang="de-DE"/>
           </a:p>
         </p:txBody>
       </p:sp>
@@ -1219,38 +1469,37 @@
           <a:p>
             <a:pPr lvl="0"/>
             <a:r>
-              <a:rPr lang="de-DE" smtClean="0"/>
+              <a:rPr lang="de-DE"/>
               <a:t>Mastertextformat bearbeiten</a:t>
             </a:r>
           </a:p>
           <a:p>
             <a:pPr lvl="1"/>
             <a:r>
-              <a:rPr lang="de-DE" smtClean="0"/>
+              <a:rPr lang="de-DE"/>
               <a:t>Zweite Ebene</a:t>
             </a:r>
           </a:p>
           <a:p>
             <a:pPr lvl="2"/>
             <a:r>
-              <a:rPr lang="de-DE" smtClean="0"/>
+              <a:rPr lang="de-DE"/>
               <a:t>Dritte Ebene</a:t>
             </a:r>
           </a:p>
           <a:p>
             <a:pPr lvl="3"/>
             <a:r>
-              <a:rPr lang="de-DE" smtClean="0"/>
+              <a:rPr lang="de-DE"/>
               <a:t>Vierte Ebene</a:t>
             </a:r>
           </a:p>
           <a:p>
             <a:pPr lvl="4"/>
             <a:r>
-              <a:rPr lang="de-DE" smtClean="0"/>
+              <a:rPr lang="de-DE"/>
               <a:t>Fünfte Ebene</a:t>
             </a:r>
-            <a:endParaRPr lang="de-DE"/>
           </a:p>
         </p:txBody>
       </p:sp>
@@ -1271,7 +1520,7 @@
           <a:p>
             <a:fld id="{C92B74A0-65D7-6742-9E62-732E39422DA6}" type="datetimeFigureOut">
               <a:rPr lang="de-DE" smtClean="0"/>
-              <a:t>14.02.23</a:t>
+              <a:t>03.06.25</a:t>
             </a:fld>
             <a:endParaRPr lang="de-DE"/>
           </a:p>
@@ -1374,10 +1623,9 @@
           </a:lstStyle>
           <a:p>
             <a:r>
-              <a:rPr lang="de-DE" smtClean="0"/>
+              <a:rPr lang="de-DE"/>
               <a:t>Mastertitelformat bearbeiten</a:t>
             </a:r>
-            <a:endParaRPr lang="de-DE"/>
           </a:p>
         </p:txBody>
       </p:sp>
@@ -1494,7 +1742,7 @@
           <a:p>
             <a:pPr lvl="0"/>
             <a:r>
-              <a:rPr lang="de-DE" smtClean="0"/>
+              <a:rPr lang="de-DE"/>
               <a:t>Mastertextformat bearbeiten</a:t>
             </a:r>
           </a:p>
@@ -1517,7 +1765,7 @@
           <a:p>
             <a:fld id="{C92B74A0-65D7-6742-9E62-732E39422DA6}" type="datetimeFigureOut">
               <a:rPr lang="de-DE" smtClean="0"/>
-              <a:t>14.02.23</a:t>
+              <a:t>03.06.25</a:t>
             </a:fld>
             <a:endParaRPr lang="de-DE"/>
           </a:p>
@@ -1611,10 +1859,9 @@
           <a:lstStyle/>
           <a:p>
             <a:r>
-              <a:rPr lang="de-DE" smtClean="0"/>
+              <a:rPr lang="de-DE"/>
               <a:t>Mastertitelformat bearbeiten</a:t>
             </a:r>
-            <a:endParaRPr lang="de-DE"/>
           </a:p>
         </p:txBody>
       </p:sp>
@@ -1640,38 +1887,37 @@
           <a:p>
             <a:pPr lvl="0"/>
             <a:r>
-              <a:rPr lang="de-DE" smtClean="0"/>
+              <a:rPr lang="de-DE"/>
               <a:t>Mastertextformat bearbeiten</a:t>
             </a:r>
           </a:p>
           <a:p>
             <a:pPr lvl="1"/>
             <a:r>
-              <a:rPr lang="de-DE" smtClean="0"/>
+              <a:rPr lang="de-DE"/>
               <a:t>Zweite Ebene</a:t>
             </a:r>
           </a:p>
           <a:p>
             <a:pPr lvl="2"/>
             <a:r>
-              <a:rPr lang="de-DE" smtClean="0"/>
+              <a:rPr lang="de-DE"/>
               <a:t>Dritte Ebene</a:t>
             </a:r>
           </a:p>
           <a:p>
             <a:pPr lvl="3"/>
             <a:r>
-              <a:rPr lang="de-DE" smtClean="0"/>
+              <a:rPr lang="de-DE"/>
               <a:t>Vierte Ebene</a:t>
             </a:r>
           </a:p>
           <a:p>
             <a:pPr lvl="4"/>
             <a:r>
-              <a:rPr lang="de-DE" smtClean="0"/>
+              <a:rPr lang="de-DE"/>
               <a:t>Fünfte Ebene</a:t>
             </a:r>
-            <a:endParaRPr lang="de-DE"/>
           </a:p>
         </p:txBody>
       </p:sp>
@@ -1697,38 +1943,37 @@
           <a:p>
             <a:pPr lvl="0"/>
             <a:r>
-              <a:rPr lang="de-DE" smtClean="0"/>
+              <a:rPr lang="de-DE"/>
               <a:t>Mastertextformat bearbeiten</a:t>
             </a:r>
           </a:p>
           <a:p>
             <a:pPr lvl="1"/>
             <a:r>
-              <a:rPr lang="de-DE" smtClean="0"/>
+              <a:rPr lang="de-DE"/>
               <a:t>Zweite Ebene</a:t>
             </a:r>
           </a:p>
           <a:p>
             <a:pPr lvl="2"/>
             <a:r>
-              <a:rPr lang="de-DE" smtClean="0"/>
+              <a:rPr lang="de-DE"/>
               <a:t>Dritte Ebene</a:t>
             </a:r>
           </a:p>
           <a:p>
             <a:pPr lvl="3"/>
             <a:r>
-              <a:rPr lang="de-DE" smtClean="0"/>
+              <a:rPr lang="de-DE"/>
               <a:t>Vierte Ebene</a:t>
             </a:r>
           </a:p>
           <a:p>
             <a:pPr lvl="4"/>
             <a:r>
-              <a:rPr lang="de-DE" smtClean="0"/>
+              <a:rPr lang="de-DE"/>
               <a:t>Fünfte Ebene</a:t>
             </a:r>
-            <a:endParaRPr lang="de-DE"/>
           </a:p>
         </p:txBody>
       </p:sp>
@@ -1749,7 +1994,7 @@
           <a:p>
             <a:fld id="{C92B74A0-65D7-6742-9E62-732E39422DA6}" type="datetimeFigureOut">
               <a:rPr lang="de-DE" smtClean="0"/>
-              <a:t>14.02.23</a:t>
+              <a:t>03.06.25</a:t>
             </a:fld>
             <a:endParaRPr lang="de-DE"/>
           </a:p>
@@ -1848,10 +2093,9 @@
           <a:lstStyle/>
           <a:p>
             <a:r>
-              <a:rPr lang="de-DE" smtClean="0"/>
+              <a:rPr lang="de-DE"/>
               <a:t>Mastertitelformat bearbeiten</a:t>
             </a:r>
-            <a:endParaRPr lang="de-DE"/>
           </a:p>
         </p:txBody>
       </p:sp>
@@ -1914,7 +2158,7 @@
           <a:p>
             <a:pPr lvl="0"/>
             <a:r>
-              <a:rPr lang="de-DE" smtClean="0"/>
+              <a:rPr lang="de-DE"/>
               <a:t>Mastertextformat bearbeiten</a:t>
             </a:r>
           </a:p>
@@ -1942,38 +2186,37 @@
           <a:p>
             <a:pPr lvl="0"/>
             <a:r>
-              <a:rPr lang="de-DE" smtClean="0"/>
+              <a:rPr lang="de-DE"/>
               <a:t>Mastertextformat bearbeiten</a:t>
             </a:r>
           </a:p>
           <a:p>
             <a:pPr lvl="1"/>
             <a:r>
-              <a:rPr lang="de-DE" smtClean="0"/>
+              <a:rPr lang="de-DE"/>
               <a:t>Zweite Ebene</a:t>
             </a:r>
           </a:p>
           <a:p>
             <a:pPr lvl="2"/>
             <a:r>
-              <a:rPr lang="de-DE" smtClean="0"/>
+              <a:rPr lang="de-DE"/>
               <a:t>Dritte Ebene</a:t>
             </a:r>
           </a:p>
           <a:p>
             <a:pPr lvl="3"/>
             <a:r>
-              <a:rPr lang="de-DE" smtClean="0"/>
+              <a:rPr lang="de-DE"/>
               <a:t>Vierte Ebene</a:t>
             </a:r>
           </a:p>
           <a:p>
             <a:pPr lvl="4"/>
             <a:r>
-              <a:rPr lang="de-DE" smtClean="0"/>
+              <a:rPr lang="de-DE"/>
               <a:t>Fünfte Ebene</a:t>
             </a:r>
-            <a:endParaRPr lang="de-DE"/>
           </a:p>
         </p:txBody>
       </p:sp>
@@ -2036,7 +2279,7 @@
           <a:p>
             <a:pPr lvl="0"/>
             <a:r>
-              <a:rPr lang="de-DE" smtClean="0"/>
+              <a:rPr lang="de-DE"/>
               <a:t>Mastertextformat bearbeiten</a:t>
             </a:r>
           </a:p>
@@ -2064,38 +2307,37 @@
           <a:p>
             <a:pPr lvl="0"/>
             <a:r>
-              <a:rPr lang="de-DE" smtClean="0"/>
+              <a:rPr lang="de-DE"/>
               <a:t>Mastertextformat bearbeiten</a:t>
             </a:r>
           </a:p>
           <a:p>
             <a:pPr lvl="1"/>
             <a:r>
-              <a:rPr lang="de-DE" smtClean="0"/>
+              <a:rPr lang="de-DE"/>
               <a:t>Zweite Ebene</a:t>
             </a:r>
           </a:p>
           <a:p>
             <a:pPr lvl="2"/>
             <a:r>
-              <a:rPr lang="de-DE" smtClean="0"/>
+              <a:rPr lang="de-DE"/>
               <a:t>Dritte Ebene</a:t>
             </a:r>
           </a:p>
           <a:p>
             <a:pPr lvl="3"/>
             <a:r>
-              <a:rPr lang="de-DE" smtClean="0"/>
+              <a:rPr lang="de-DE"/>
               <a:t>Vierte Ebene</a:t>
             </a:r>
           </a:p>
           <a:p>
             <a:pPr lvl="4"/>
             <a:r>
-              <a:rPr lang="de-DE" smtClean="0"/>
+              <a:rPr lang="de-DE"/>
               <a:t>Fünfte Ebene</a:t>
             </a:r>
-            <a:endParaRPr lang="de-DE"/>
           </a:p>
         </p:txBody>
       </p:sp>
@@ -2116,7 +2358,7 @@
           <a:p>
             <a:fld id="{C92B74A0-65D7-6742-9E62-732E39422DA6}" type="datetimeFigureOut">
               <a:rPr lang="de-DE" smtClean="0"/>
-              <a:t>14.02.23</a:t>
+              <a:t>03.06.25</a:t>
             </a:fld>
             <a:endParaRPr lang="de-DE"/>
           </a:p>
@@ -2210,10 +2452,9 @@
           <a:lstStyle/>
           <a:p>
             <a:r>
-              <a:rPr lang="de-DE" smtClean="0"/>
+              <a:rPr lang="de-DE"/>
               <a:t>Mastertitelformat bearbeiten</a:t>
             </a:r>
-            <a:endParaRPr lang="de-DE"/>
           </a:p>
         </p:txBody>
       </p:sp>
@@ -2234,7 +2475,7 @@
           <a:p>
             <a:fld id="{C92B74A0-65D7-6742-9E62-732E39422DA6}" type="datetimeFigureOut">
               <a:rPr lang="de-DE" smtClean="0"/>
-              <a:t>14.02.23</a:t>
+              <a:t>03.06.25</a:t>
             </a:fld>
             <a:endParaRPr lang="de-DE"/>
           </a:p>
@@ -2329,7 +2570,7 @@
           <a:p>
             <a:fld id="{C92B74A0-65D7-6742-9E62-732E39422DA6}" type="datetimeFigureOut">
               <a:rPr lang="de-DE" smtClean="0"/>
-              <a:t>14.02.23</a:t>
+              <a:t>03.06.25</a:t>
             </a:fld>
             <a:endParaRPr lang="de-DE"/>
           </a:p>
@@ -2432,10 +2673,9 @@
           </a:lstStyle>
           <a:p>
             <a:r>
-              <a:rPr lang="de-DE" smtClean="0"/>
+              <a:rPr lang="de-DE"/>
               <a:t>Mastertitelformat bearbeiten</a:t>
             </a:r>
-            <a:endParaRPr lang="de-DE"/>
           </a:p>
         </p:txBody>
       </p:sp>
@@ -2489,38 +2729,37 @@
           <a:p>
             <a:pPr lvl="0"/>
             <a:r>
-              <a:rPr lang="de-DE" smtClean="0"/>
+              <a:rPr lang="de-DE"/>
               <a:t>Mastertextformat bearbeiten</a:t>
             </a:r>
           </a:p>
           <a:p>
             <a:pPr lvl="1"/>
             <a:r>
-              <a:rPr lang="de-DE" smtClean="0"/>
+              <a:rPr lang="de-DE"/>
               <a:t>Zweite Ebene</a:t>
             </a:r>
           </a:p>
           <a:p>
             <a:pPr lvl="2"/>
             <a:r>
-              <a:rPr lang="de-DE" smtClean="0"/>
+              <a:rPr lang="de-DE"/>
               <a:t>Dritte Ebene</a:t>
             </a:r>
           </a:p>
           <a:p>
             <a:pPr lvl="3"/>
             <a:r>
-              <a:rPr lang="de-DE" smtClean="0"/>
+              <a:rPr lang="de-DE"/>
               <a:t>Vierte Ebene</a:t>
             </a:r>
           </a:p>
           <a:p>
             <a:pPr lvl="4"/>
             <a:r>
-              <a:rPr lang="de-DE" smtClean="0"/>
+              <a:rPr lang="de-DE"/>
               <a:t>Fünfte Ebene</a:t>
             </a:r>
-            <a:endParaRPr lang="de-DE"/>
           </a:p>
         </p:txBody>
       </p:sp>
@@ -2583,7 +2822,7 @@
           <a:p>
             <a:pPr lvl="0"/>
             <a:r>
-              <a:rPr lang="de-DE" smtClean="0"/>
+              <a:rPr lang="de-DE"/>
               <a:t>Mastertextformat bearbeiten</a:t>
             </a:r>
           </a:p>
@@ -2606,7 +2845,7 @@
           <a:p>
             <a:fld id="{C92B74A0-65D7-6742-9E62-732E39422DA6}" type="datetimeFigureOut">
               <a:rPr lang="de-DE" smtClean="0"/>
-              <a:t>14.02.23</a:t>
+              <a:t>03.06.25</a:t>
             </a:fld>
             <a:endParaRPr lang="de-DE"/>
           </a:p>
@@ -2709,10 +2948,9 @@
           </a:lstStyle>
           <a:p>
             <a:r>
-              <a:rPr lang="de-DE" smtClean="0"/>
+              <a:rPr lang="de-DE"/>
               <a:t>Mastertitelformat bearbeiten</a:t>
             </a:r>
-            <a:endParaRPr lang="de-DE"/>
           </a:p>
         </p:txBody>
       </p:sp>
@@ -2836,7 +3074,7 @@
           <a:p>
             <a:pPr lvl="0"/>
             <a:r>
-              <a:rPr lang="de-DE" smtClean="0"/>
+              <a:rPr lang="de-DE"/>
               <a:t>Mastertextformat bearbeiten</a:t>
             </a:r>
           </a:p>
@@ -2859,7 +3097,7 @@
           <a:p>
             <a:fld id="{C92B74A0-65D7-6742-9E62-732E39422DA6}" type="datetimeFigureOut">
               <a:rPr lang="de-DE" smtClean="0"/>
-              <a:t>14.02.23</a:t>
+              <a:t>03.06.25</a:t>
             </a:fld>
             <a:endParaRPr lang="de-DE"/>
           </a:p>
@@ -2968,10 +3206,9 @@
           <a:lstStyle/>
           <a:p>
             <a:r>
-              <a:rPr lang="de-DE" smtClean="0"/>
+              <a:rPr lang="de-DE"/>
               <a:t>Mastertitelformat bearbeiten</a:t>
             </a:r>
-            <a:endParaRPr lang="de-DE"/>
           </a:p>
         </p:txBody>
       </p:sp>
@@ -3002,38 +3239,37 @@
           <a:p>
             <a:pPr lvl="0"/>
             <a:r>
-              <a:rPr lang="de-DE" smtClean="0"/>
+              <a:rPr lang="de-DE"/>
               <a:t>Mastertextformat bearbeiten</a:t>
             </a:r>
           </a:p>
           <a:p>
             <a:pPr lvl="1"/>
             <a:r>
-              <a:rPr lang="de-DE" smtClean="0"/>
+              <a:rPr lang="de-DE"/>
               <a:t>Zweite Ebene</a:t>
             </a:r>
           </a:p>
           <a:p>
             <a:pPr lvl="2"/>
             <a:r>
-              <a:rPr lang="de-DE" smtClean="0"/>
+              <a:rPr lang="de-DE"/>
               <a:t>Dritte Ebene</a:t>
             </a:r>
           </a:p>
           <a:p>
             <a:pPr lvl="3"/>
             <a:r>
-              <a:rPr lang="de-DE" smtClean="0"/>
+              <a:rPr lang="de-DE"/>
               <a:t>Vierte Ebene</a:t>
             </a:r>
           </a:p>
           <a:p>
             <a:pPr lvl="4"/>
             <a:r>
-              <a:rPr lang="de-DE" smtClean="0"/>
+              <a:rPr lang="de-DE"/>
               <a:t>Fünfte Ebene</a:t>
             </a:r>
-            <a:endParaRPr lang="de-DE"/>
           </a:p>
         </p:txBody>
       </p:sp>
@@ -3072,7 +3308,7 @@
           <a:p>
             <a:fld id="{C92B74A0-65D7-6742-9E62-732E39422DA6}" type="datetimeFigureOut">
               <a:rPr lang="de-DE" smtClean="0"/>
-              <a:t>14.02.23</a:t>
+              <a:t>03.06.25</a:t>
             </a:fld>
             <a:endParaRPr lang="de-DE"/>
           </a:p>
@@ -3493,7 +3729,7 @@
           <a:lstStyle/>
           <a:p>
             <a:r>
-              <a:rPr lang="de-DE" dirty="0" err="1" smtClean="0"/>
+              <a:rPr lang="de-DE" dirty="0" err="1"/>
               <a:t>pySemanticSlides</a:t>
             </a:r>
             <a:endParaRPr lang="de-DE" dirty="0"/>
@@ -3516,23 +3752,23 @@
           <a:lstStyle/>
           <a:p>
             <a:r>
-              <a:rPr lang="de-DE" dirty="0" err="1" smtClean="0"/>
+              <a:rPr lang="de-DE" dirty="0" err="1"/>
               <a:t>Semantify</a:t>
             </a:r>
             <a:r>
-              <a:rPr lang="de-DE" dirty="0" smtClean="0"/>
+              <a:rPr lang="de-DE" dirty="0"/>
               <a:t> </a:t>
             </a:r>
             <a:r>
-              <a:rPr lang="de-DE" dirty="0" err="1" smtClean="0"/>
+              <a:rPr lang="de-DE" dirty="0" err="1"/>
               <a:t>your</a:t>
             </a:r>
             <a:r>
-              <a:rPr lang="de-DE" dirty="0" smtClean="0"/>
+              <a:rPr lang="de-DE" dirty="0"/>
               <a:t> </a:t>
             </a:r>
             <a:r>
-              <a:rPr lang="de-DE" dirty="0" err="1" smtClean="0"/>
+              <a:rPr lang="de-DE" dirty="0" err="1"/>
               <a:t>Presentations</a:t>
             </a:r>
             <a:endParaRPr lang="de-DE" dirty="0"/>
@@ -3585,181 +3821,180 @@
           <a:lstStyle/>
           <a:p>
             <a:r>
-              <a:rPr lang="de-DE" dirty="0" err="1" smtClean="0"/>
+              <a:rPr lang="de-DE" dirty="0" err="1"/>
               <a:t>Why</a:t>
             </a:r>
             <a:r>
-              <a:rPr lang="de-DE" dirty="0" smtClean="0"/>
+              <a:rPr lang="de-DE" dirty="0"/>
               <a:t> </a:t>
             </a:r>
             <a:r>
-              <a:rPr lang="de-DE" dirty="0" err="1" smtClean="0"/>
+              <a:rPr lang="de-DE" dirty="0" err="1"/>
               <a:t>semantify</a:t>
             </a:r>
             <a:r>
-              <a:rPr lang="de-DE" dirty="0" smtClean="0"/>
+              <a:rPr lang="de-DE" dirty="0"/>
               <a:t> </a:t>
             </a:r>
             <a:r>
-              <a:rPr lang="de-DE" dirty="0" err="1" smtClean="0"/>
+              <a:rPr lang="de-DE" dirty="0" err="1"/>
               <a:t>your</a:t>
             </a:r>
             <a:r>
-              <a:rPr lang="de-DE" dirty="0" smtClean="0"/>
+              <a:rPr lang="de-DE" dirty="0"/>
               <a:t> </a:t>
             </a:r>
             <a:r>
-              <a:rPr lang="de-DE" dirty="0" err="1" smtClean="0"/>
+              <a:rPr lang="de-DE" dirty="0" err="1"/>
               <a:t>slides</a:t>
             </a:r>
             <a:r>
-              <a:rPr lang="de-DE" dirty="0" smtClean="0"/>
+              <a:rPr lang="de-DE" dirty="0"/>
               <a:t>?</a:t>
             </a:r>
+          </a:p>
+        </p:txBody>
+      </p:sp>
+      <p:sp>
+        <p:nvSpPr>
+          <p:cNvPr id="3" name="Inhaltsplatzhalter 2"/>
+          <p:cNvSpPr>
+            <a:spLocks noGrp="1"/>
+          </p:cNvSpPr>
+          <p:nvPr>
+            <p:ph idx="1"/>
+          </p:nvPr>
+        </p:nvSpPr>
+        <p:spPr/>
+        <p:txBody>
+          <a:bodyPr/>
+          <a:lstStyle/>
+          <a:p>
+            <a:r>
+              <a:rPr lang="de-DE" dirty="0"/>
+              <a:t>The </a:t>
+            </a:r>
+            <a:r>
+              <a:rPr lang="de-DE" dirty="0" err="1"/>
+              <a:t>valuable</a:t>
+            </a:r>
+            <a:r>
+              <a:rPr lang="de-DE" dirty="0"/>
+              <a:t> </a:t>
+            </a:r>
+            <a:r>
+              <a:rPr lang="de-DE" dirty="0" err="1"/>
+              <a:t>content</a:t>
+            </a:r>
+            <a:r>
+              <a:rPr lang="de-DE" dirty="0"/>
+              <a:t> </a:t>
+            </a:r>
+            <a:r>
+              <a:rPr lang="de-DE" dirty="0" err="1"/>
+              <a:t>of</a:t>
+            </a:r>
+            <a:r>
+              <a:rPr lang="de-DE" dirty="0"/>
+              <a:t> </a:t>
+            </a:r>
+            <a:r>
+              <a:rPr lang="de-DE" dirty="0" err="1"/>
+              <a:t>your</a:t>
+            </a:r>
+            <a:r>
+              <a:rPr lang="de-DE" dirty="0"/>
+              <a:t> </a:t>
+            </a:r>
+            <a:r>
+              <a:rPr lang="de-DE" dirty="0" err="1"/>
+              <a:t>presentation</a:t>
+            </a:r>
+            <a:r>
+              <a:rPr lang="de-DE" dirty="0"/>
+              <a:t> </a:t>
+            </a:r>
+            <a:r>
+              <a:rPr lang="de-DE" dirty="0" err="1"/>
+              <a:t>is</a:t>
+            </a:r>
+            <a:r>
+              <a:rPr lang="de-DE" dirty="0"/>
+              <a:t> </a:t>
+            </a:r>
+            <a:r>
+              <a:rPr lang="de-DE" dirty="0" err="1"/>
+              <a:t>hidden</a:t>
+            </a:r>
+            <a:r>
+              <a:rPr lang="de-DE" dirty="0"/>
+              <a:t> </a:t>
+            </a:r>
+            <a:r>
+              <a:rPr lang="de-DE" dirty="0" err="1"/>
+              <a:t>if</a:t>
+            </a:r>
+            <a:r>
+              <a:rPr lang="de-DE" dirty="0"/>
+              <a:t> </a:t>
+            </a:r>
+            <a:r>
+              <a:rPr lang="de-DE" dirty="0" err="1"/>
+              <a:t>it</a:t>
+            </a:r>
+            <a:r>
+              <a:rPr lang="de-DE" dirty="0"/>
+              <a:t> </a:t>
+            </a:r>
+            <a:r>
+              <a:rPr lang="de-DE" dirty="0" err="1"/>
+              <a:t>is</a:t>
+            </a:r>
+            <a:r>
+              <a:rPr lang="de-DE" dirty="0"/>
+              <a:t> not </a:t>
+            </a:r>
+            <a:br>
+              <a:rPr lang="de-DE" dirty="0"/>
+            </a:br>
+            <a:r>
+              <a:rPr lang="de-DE" dirty="0"/>
+              <a:t>FAIR:</a:t>
+            </a:r>
+          </a:p>
+          <a:p>
+            <a:pPr lvl="1"/>
+            <a:r>
+              <a:rPr lang="de-DE" dirty="0" err="1"/>
+              <a:t>Findable</a:t>
+            </a:r>
+            <a:r>
+              <a:rPr lang="de-DE" dirty="0"/>
+              <a:t>	</a:t>
+            </a:r>
+          </a:p>
+          <a:p>
+            <a:pPr lvl="1"/>
+            <a:r>
+              <a:rPr lang="de-DE" dirty="0" err="1"/>
+              <a:t>Accessible</a:t>
+            </a:r>
             <a:endParaRPr lang="de-DE" dirty="0"/>
           </a:p>
-        </p:txBody>
-      </p:sp>
-      <p:sp>
-        <p:nvSpPr>
-          <p:cNvPr id="3" name="Inhaltsplatzhalter 2"/>
-          <p:cNvSpPr>
-            <a:spLocks noGrp="1"/>
-          </p:cNvSpPr>
-          <p:nvPr>
-            <p:ph idx="1"/>
-          </p:nvPr>
-        </p:nvSpPr>
-        <p:spPr/>
-        <p:txBody>
-          <a:bodyPr/>
-          <a:lstStyle/>
-          <a:p>
-            <a:r>
-              <a:rPr lang="de-DE" dirty="0" smtClean="0"/>
-              <a:t>The </a:t>
-            </a:r>
-            <a:r>
-              <a:rPr lang="de-DE" dirty="0" err="1" smtClean="0"/>
-              <a:t>valuable</a:t>
-            </a:r>
-            <a:r>
-              <a:rPr lang="de-DE" dirty="0" smtClean="0"/>
-              <a:t> </a:t>
-            </a:r>
-            <a:r>
-              <a:rPr lang="de-DE" dirty="0" err="1" smtClean="0"/>
-              <a:t>content</a:t>
-            </a:r>
-            <a:r>
-              <a:rPr lang="de-DE" dirty="0" smtClean="0"/>
-              <a:t> </a:t>
-            </a:r>
-            <a:r>
-              <a:rPr lang="de-DE" dirty="0" err="1" smtClean="0"/>
-              <a:t>of</a:t>
-            </a:r>
-            <a:r>
-              <a:rPr lang="de-DE" dirty="0" smtClean="0"/>
-              <a:t> </a:t>
-            </a:r>
-            <a:r>
-              <a:rPr lang="de-DE" dirty="0" err="1" smtClean="0"/>
-              <a:t>your</a:t>
-            </a:r>
-            <a:r>
-              <a:rPr lang="de-DE" dirty="0" smtClean="0"/>
-              <a:t> </a:t>
-            </a:r>
-            <a:r>
-              <a:rPr lang="de-DE" dirty="0" err="1" smtClean="0"/>
-              <a:t>presentation</a:t>
-            </a:r>
-            <a:r>
-              <a:rPr lang="de-DE" dirty="0" smtClean="0"/>
-              <a:t> </a:t>
-            </a:r>
-            <a:r>
-              <a:rPr lang="de-DE" dirty="0" err="1" smtClean="0"/>
-              <a:t>is</a:t>
-            </a:r>
-            <a:r>
-              <a:rPr lang="de-DE" dirty="0" smtClean="0"/>
-              <a:t> </a:t>
-            </a:r>
-            <a:r>
-              <a:rPr lang="de-DE" dirty="0" err="1" smtClean="0"/>
-              <a:t>hidden</a:t>
-            </a:r>
-            <a:r>
-              <a:rPr lang="de-DE" dirty="0" smtClean="0"/>
-              <a:t> </a:t>
-            </a:r>
-            <a:r>
-              <a:rPr lang="de-DE" dirty="0" err="1" smtClean="0"/>
-              <a:t>if</a:t>
-            </a:r>
-            <a:r>
-              <a:rPr lang="de-DE" dirty="0" smtClean="0"/>
-              <a:t> </a:t>
-            </a:r>
-            <a:r>
-              <a:rPr lang="de-DE" dirty="0" err="1" smtClean="0"/>
-              <a:t>it</a:t>
-            </a:r>
-            <a:r>
-              <a:rPr lang="de-DE" dirty="0" smtClean="0"/>
-              <a:t> </a:t>
-            </a:r>
-            <a:r>
-              <a:rPr lang="de-DE" dirty="0" err="1" smtClean="0"/>
-              <a:t>is</a:t>
-            </a:r>
-            <a:r>
-              <a:rPr lang="de-DE" dirty="0" smtClean="0"/>
-              <a:t> not </a:t>
-            </a:r>
-            <a:br>
-              <a:rPr lang="de-DE" dirty="0" smtClean="0"/>
-            </a:br>
-            <a:r>
-              <a:rPr lang="de-DE" dirty="0" smtClean="0"/>
-              <a:t>FAIR:</a:t>
-            </a:r>
-          </a:p>
           <a:p>
             <a:pPr lvl="1"/>
             <a:r>
-              <a:rPr lang="de-DE" dirty="0" err="1" smtClean="0"/>
-              <a:t>Findable</a:t>
-            </a:r>
-            <a:r>
-              <a:rPr lang="de-DE" dirty="0" smtClean="0"/>
-              <a:t>	</a:t>
+              <a:rPr lang="de-DE" dirty="0"/>
+              <a:t>Interoperable</a:t>
             </a:r>
           </a:p>
           <a:p>
             <a:pPr lvl="1"/>
             <a:r>
-              <a:rPr lang="de-DE" dirty="0" err="1" smtClean="0"/>
-              <a:t>Accessible</a:t>
-            </a:r>
-            <a:endParaRPr lang="de-DE" dirty="0" smtClean="0"/>
-          </a:p>
-          <a:p>
-            <a:pPr lvl="1"/>
-            <a:r>
-              <a:rPr lang="de-DE" dirty="0" smtClean="0"/>
-              <a:t>Interoperable</a:t>
-            </a:r>
-          </a:p>
-          <a:p>
-            <a:pPr lvl="1"/>
-            <a:r>
-              <a:rPr lang="de-DE" dirty="0" err="1" smtClean="0"/>
+              <a:rPr lang="de-DE" dirty="0" err="1"/>
               <a:t>Reusable</a:t>
             </a:r>
-            <a:endParaRPr lang="de-DE" dirty="0" smtClean="0"/>
+            <a:endParaRPr lang="de-DE" dirty="0"/>
           </a:p>
           <a:p>
             <a:endParaRPr lang="de-DE" dirty="0"/>
@@ -3770,6 +4005,192 @@
     <p:extLst>
       <p:ext uri="{BB962C8B-B14F-4D97-AF65-F5344CB8AC3E}">
         <p14:creationId xmlns:p14="http://schemas.microsoft.com/office/powerpoint/2010/main" val="1684292690"/>
+      </p:ext>
+    </p:extLst>
+  </p:cSld>
+  <p:clrMapOvr>
+    <a:masterClrMapping/>
+  </p:clrMapOvr>
+</p:sld>
+</file>
+
+<file path=ppt/slides/slide3.xml><?xml version="1.0" encoding="utf-8"?>
+<p:sld xmlns:a="http://schemas.openxmlformats.org/drawingml/2006/main" xmlns:r="http://schemas.openxmlformats.org/officeDocument/2006/relationships" xmlns:p="http://schemas.openxmlformats.org/presentationml/2006/main">
+  <p:cSld>
+    <p:spTree>
+      <p:nvGrpSpPr>
+        <p:cNvPr id="1" name=""/>
+        <p:cNvGrpSpPr/>
+        <p:nvPr/>
+      </p:nvGrpSpPr>
+      <p:grpSpPr>
+        <a:xfrm>
+          <a:off x="0" y="0"/>
+          <a:ext cx="0" cy="0"/>
+          <a:chOff x="0" y="0"/>
+          <a:chExt cx="0" cy="0"/>
+        </a:xfrm>
+      </p:grpSpPr>
+      <p:sp>
+        <p:nvSpPr>
+          <p:cNvPr id="2" name="Titel 1">
+            <a:extLst>
+              <a:ext uri="{FF2B5EF4-FFF2-40B4-BE49-F238E27FC236}">
+                <a16:creationId xmlns:a16="http://schemas.microsoft.com/office/drawing/2014/main" id="{BFFBD863-727A-250F-397E-4409580D395A}"/>
+              </a:ext>
+            </a:extLst>
+          </p:cNvPr>
+          <p:cNvSpPr>
+            <a:spLocks noGrp="1"/>
+          </p:cNvSpPr>
+          <p:nvPr>
+            <p:ph type="title"/>
+          </p:nvPr>
+        </p:nvSpPr>
+        <p:spPr/>
+        <p:txBody>
+          <a:bodyPr/>
+          <a:lstStyle/>
+          <a:p>
+            <a:r>
+              <a:rPr lang="de-DE" dirty="0"/>
+              <a:t>Key/Value Parser</a:t>
+            </a:r>
+          </a:p>
+        </p:txBody>
+      </p:sp>
+      <p:sp>
+        <p:nvSpPr>
+          <p:cNvPr id="3" name="Inhaltsplatzhalter 2">
+            <a:extLst>
+              <a:ext uri="{FF2B5EF4-FFF2-40B4-BE49-F238E27FC236}">
+                <a16:creationId xmlns:a16="http://schemas.microsoft.com/office/drawing/2014/main" id="{6DD3B81F-DA9E-1FC7-135A-6E8F9FBD7FC7}"/>
+              </a:ext>
+            </a:extLst>
+          </p:cNvPr>
+          <p:cNvSpPr>
+            <a:spLocks noGrp="1"/>
+          </p:cNvSpPr>
+          <p:nvPr>
+            <p:ph idx="1"/>
+          </p:nvPr>
+        </p:nvSpPr>
+        <p:spPr/>
+        <p:txBody>
+          <a:bodyPr/>
+          <a:lstStyle/>
+          <a:p>
+            <a:r>
+              <a:rPr lang="de-DE" dirty="0" err="1"/>
+              <a:t>If</a:t>
+            </a:r>
+            <a:r>
+              <a:rPr lang="de-DE" dirty="0"/>
+              <a:t> </a:t>
+            </a:r>
+            <a:r>
+              <a:rPr lang="de-DE" dirty="0" err="1"/>
+              <a:t>you</a:t>
+            </a:r>
+            <a:r>
+              <a:rPr lang="de-DE" dirty="0"/>
+              <a:t> </a:t>
+            </a:r>
+            <a:r>
+              <a:rPr lang="de-DE" dirty="0" err="1"/>
+              <a:t>use</a:t>
+            </a:r>
+            <a:r>
+              <a:rPr lang="de-DE" dirty="0"/>
+              <a:t> </a:t>
+            </a:r>
+            <a:r>
+              <a:rPr lang="de-DE" dirty="0" err="1"/>
+              <a:t>annotation</a:t>
+            </a:r>
+            <a:r>
+              <a:rPr lang="de-DE" dirty="0"/>
+              <a:t> in </a:t>
+            </a:r>
+            <a:r>
+              <a:rPr lang="de-DE" dirty="0" err="1"/>
+              <a:t>your</a:t>
+            </a:r>
+            <a:r>
+              <a:rPr lang="de-DE" dirty="0"/>
+              <a:t> </a:t>
+            </a:r>
+            <a:r>
+              <a:rPr lang="de-DE" dirty="0" err="1"/>
+              <a:t>slide</a:t>
+            </a:r>
+            <a:r>
+              <a:rPr lang="de-DE" dirty="0"/>
+              <a:t> </a:t>
+            </a:r>
+            <a:r>
+              <a:rPr lang="de-DE" dirty="0" err="1"/>
+              <a:t>notes</a:t>
+            </a:r>
+            <a:r>
+              <a:rPr lang="de-DE" dirty="0"/>
+              <a:t> </a:t>
+            </a:r>
+            <a:r>
+              <a:rPr lang="de-DE" dirty="0" err="1"/>
+              <a:t>you</a:t>
+            </a:r>
+            <a:r>
+              <a:rPr lang="de-DE" dirty="0"/>
+              <a:t> </a:t>
+            </a:r>
+            <a:r>
+              <a:rPr lang="de-DE" dirty="0" err="1"/>
+              <a:t>can</a:t>
+            </a:r>
+            <a:r>
+              <a:rPr lang="de-DE" dirty="0"/>
+              <a:t> </a:t>
+            </a:r>
+            <a:r>
+              <a:rPr lang="de-DE" dirty="0" err="1"/>
+              <a:t>semantically</a:t>
+            </a:r>
+            <a:r>
+              <a:rPr lang="de-DE" dirty="0"/>
+              <a:t> </a:t>
+            </a:r>
+            <a:r>
+              <a:rPr lang="de-DE" dirty="0" err="1"/>
+              <a:t>enrich</a:t>
+            </a:r>
+            <a:r>
+              <a:rPr lang="de-DE" dirty="0"/>
+              <a:t> </a:t>
+            </a:r>
+            <a:r>
+              <a:rPr lang="de-DE" dirty="0" err="1"/>
+              <a:t>your</a:t>
+            </a:r>
+            <a:r>
+              <a:rPr lang="de-DE" dirty="0"/>
+              <a:t> </a:t>
+            </a:r>
+            <a:r>
+              <a:rPr lang="de-DE" dirty="0" err="1"/>
+              <a:t>content</a:t>
+            </a:r>
+            <a:r>
+              <a:rPr lang="de-DE" dirty="0"/>
+              <a:t>.</a:t>
+            </a:r>
+          </a:p>
+        </p:txBody>
+      </p:sp>
+    </p:spTree>
+    <p:extLst>
+      <p:ext uri="{BB962C8B-B14F-4D97-AF65-F5344CB8AC3E}">
+        <p14:creationId xmlns:p14="http://schemas.microsoft.com/office/powerpoint/2010/main" val="2194237288"/>
       </p:ext>
     </p:extLst>
   </p:cSld>
